--- a/lecons/USA/Economic Geography/USA_ECO_L10_Impacts_of_Agriculture_on_the_Environment.pptx
+++ b/lecons/USA/Economic Geography/USA_ECO_L10_Impacts_of_Agriculture_on_the_Environment.pptx
@@ -6317,7 +6317,7 @@
                 <a:ea typeface="Times New Roman" pitchFamily="34" charset="-122"/>
                 <a:cs typeface="Times New Roman" pitchFamily="34" charset="-120"/>
               </a:rPr>
-              <a:t>Lesson 10: Impacts of Agriculture on the Environment</a:t>
+              <a:t>Lesson 10</a:t>
             </a:r>
             <a:endParaRPr lang="en-US" sz="2600" dirty="0"/>
           </a:p>
